--- a/primero/fisica/u3s6.pptx.pptx
+++ b/primero/fisica/u3s6.pptx.pptx
@@ -117,6 +117,66 @@
     </p:ext>
   </p:extLst>
 </p:presentation>
+</file>
+
+<file path=ppt/revisionInfo.xml><?xml version="1.0" encoding="utf-8"?>
+<p1510:revInfo xmlns:a="http://schemas.openxmlformats.org/drawingml/2006/main" xmlns:r="http://schemas.openxmlformats.org/officeDocument/2006/relationships" xmlns:p1510="http://schemas.microsoft.com/office/powerpoint/2015/10/main">
+  <p1510:revLst>
+    <p1510:client id="{4517C254-C7FA-4C5D-A443-3EE761A22D03}" v="1" dt="2026-09-02T18:37:02.914"/>
+  </p1510:revLst>
+</p1510:revInfo>
+</file>
+
+<file path=ppt/changesInfos/changesInfo1.xml><?xml version="1.0" encoding="utf-8"?>
+<pc:chgInfo xmlns:a="http://schemas.openxmlformats.org/drawingml/2006/main" xmlns:r="http://schemas.openxmlformats.org/officeDocument/2006/relationships" xmlns:ac="http://schemas.microsoft.com/office/drawing/2013/main/command" xmlns:pc="http://schemas.microsoft.com/office/powerpoint/2013/main/command">
+  <pc:docChgLst>
+    <pc:chgData name="Felipe Jiménez" userId="9d2a731f7c9b41bd" providerId="LiveId" clId="{2AE2B2D7-2040-4DAF-8A21-1032D113C8C0}"/>
+    <pc:docChg chg="custSel modSld">
+      <pc:chgData name="Felipe Jiménez" userId="9d2a731f7c9b41bd" providerId="LiveId" clId="{2AE2B2D7-2040-4DAF-8A21-1032D113C8C0}" dt="2026-09-02T18:37:11.344" v="4" actId="1076"/>
+      <pc:docMkLst>
+        <pc:docMk/>
+      </pc:docMkLst>
+      <pc:sldChg chg="delSp modSp mod">
+        <pc:chgData name="Felipe Jiménez" userId="9d2a731f7c9b41bd" providerId="LiveId" clId="{2AE2B2D7-2040-4DAF-8A21-1032D113C8C0}" dt="2026-09-02T18:37:11.344" v="4" actId="1076"/>
+        <pc:sldMkLst>
+          <pc:docMk/>
+          <pc:sldMk cId="0" sldId="258"/>
+        </pc:sldMkLst>
+        <pc:spChg chg="del">
+          <ac:chgData name="Felipe Jiménez" userId="9d2a731f7c9b41bd" providerId="LiveId" clId="{2AE2B2D7-2040-4DAF-8A21-1032D113C8C0}" dt="2026-09-02T18:37:07.632" v="3" actId="478"/>
+          <ac:spMkLst>
+            <pc:docMk/>
+            <pc:sldMk cId="0" sldId="258"/>
+            <ac:spMk id="8" creationId="{00000000-0000-0000-0000-000000000000}"/>
+          </ac:spMkLst>
+        </pc:spChg>
+        <pc:spChg chg="mod">
+          <ac:chgData name="Felipe Jiménez" userId="9d2a731f7c9b41bd" providerId="LiveId" clId="{2AE2B2D7-2040-4DAF-8A21-1032D113C8C0}" dt="2026-09-02T18:37:11.344" v="4" actId="1076"/>
+          <ac:spMkLst>
+            <pc:docMk/>
+            <pc:sldMk cId="0" sldId="258"/>
+            <ac:spMk id="10" creationId="{00000000-0000-0000-0000-000000000000}"/>
+          </ac:spMkLst>
+        </pc:spChg>
+        <pc:picChg chg="mod">
+          <ac:chgData name="Felipe Jiménez" userId="9d2a731f7c9b41bd" providerId="LiveId" clId="{2AE2B2D7-2040-4DAF-8A21-1032D113C8C0}" dt="2026-09-02T18:36:52.191" v="1" actId="14100"/>
+          <ac:picMkLst>
+            <pc:docMk/>
+            <pc:sldMk cId="0" sldId="258"/>
+            <ac:picMk id="6" creationId="{00000000-0000-0000-0000-000000000000}"/>
+          </ac:picMkLst>
+        </pc:picChg>
+      </pc:sldChg>
+      <pc:sldChg chg="modAnim">
+        <pc:chgData name="Felipe Jiménez" userId="9d2a731f7c9b41bd" providerId="LiveId" clId="{2AE2B2D7-2040-4DAF-8A21-1032D113C8C0}" dt="2026-09-02T18:37:02.914" v="2"/>
+        <pc:sldMkLst>
+          <pc:docMk/>
+          <pc:sldMk cId="0" sldId="259"/>
+        </pc:sldMkLst>
+      </pc:sldChg>
+    </pc:docChg>
+  </pc:docChgLst>
+</pc:chgInfo>
 </file>
 
 <file path=ppt/notesMasters/notesMaster1.xml><?xml version="1.0" encoding="utf-8"?>
@@ -3551,8 +3611,8 @@
         </p:blipFill>
         <p:spPr>
           <a:xfrm>
-            <a:off x="548640" y="1691640"/>
-            <a:ext cx="5212080" cy="2935224"/>
+            <a:off x="548640" y="1691639"/>
+            <a:ext cx="10789920" cy="4659783"/>
           </a:xfrm>
           <a:prstGeom prst="rect">
             <a:avLst/>
@@ -3600,35 +3660,6 @@
       </p:sp>
       <p:sp>
         <p:nvSpPr>
-          <p:cNvPr id="8" name="Shape 4"/>
-          <p:cNvSpPr/>
-          <p:nvPr/>
-        </p:nvSpPr>
-        <p:spPr>
-          <a:xfrm>
-            <a:off x="6080760" y="1691640"/>
-            <a:ext cx="5532120" cy="4297680"/>
-          </a:xfrm>
-          <a:prstGeom prst="roundRect">
-            <a:avLst>
-              <a:gd name="adj" fmla="val 2128"/>
-            </a:avLst>
-          </a:prstGeom>
-          <a:solidFill>
-            <a:srgbClr val="FFFFFF"/>
-          </a:solidFill>
-          <a:ln/>
-        </p:spPr>
-        <p:txBody>
-          <a:bodyPr/>
-          <a:lstStyle/>
-          <a:p>
-            <a:endParaRPr lang="es-CL"/>
-          </a:p>
-        </p:txBody>
-      </p:sp>
-      <p:sp>
-        <p:nvSpPr>
           <p:cNvPr id="9" name="Text 5"/>
           <p:cNvSpPr/>
           <p:nvPr/>
@@ -3674,7 +3705,7 @@
         </p:nvSpPr>
         <p:spPr>
           <a:xfrm>
-            <a:off x="6355080" y="2286000"/>
+            <a:off x="6945783" y="502920"/>
             <a:ext cx="5029200" cy="3566160"/>
           </a:xfrm>
           <a:prstGeom prst="rect">
@@ -3703,91 +3734,7 @@
                 <a:ea typeface="Calibri" pitchFamily="34" charset="-122"/>
                 <a:cs typeface="Calibri" pitchFamily="34" charset="-120"/>
               </a:rPr>
-              <a:t>Proyecta el registro completo o un fragmento inicial, según el tiempo disponible.</a:t>
-            </a:r>
-            <a:endParaRPr lang="en-US" sz="1400" dirty="0"/>
-          </a:p>
-          <a:p>
-            <a:pPr marL="342900" indent="-342900">
-              <a:spcAft>
-                <a:spcPts val="1400"/>
-              </a:spcAft>
-              <a:buSzPct val="100000"/>
-              <a:buChar char="•"/>
-            </a:pPr>
-            <a:r>
-              <a:rPr lang="en-US" sz="1400" dirty="0">
-                <a:solidFill>
-                  <a:srgbClr val="1E2A33"/>
-                </a:solidFill>
-                <a:latin typeface="Calibri" pitchFamily="34" charset="0"/>
-                <a:ea typeface="Calibri" pitchFamily="34" charset="-122"/>
-                <a:cs typeface="Calibri" pitchFamily="34" charset="-120"/>
-              </a:rPr>
-              <a:t>Antes de dar play, revísalo tú primero y decide hasta dónde mostrarlo al curso.</a:t>
-            </a:r>
-            <a:endParaRPr lang="en-US" sz="1400" dirty="0"/>
-          </a:p>
-          <a:p>
-            <a:pPr marL="342900" indent="-342900">
-              <a:spcAft>
-                <a:spcPts val="1400"/>
-              </a:spcAft>
-              <a:buSzPct val="100000"/>
-              <a:buChar char="•"/>
-            </a:pPr>
-            <a:r>
-              <a:rPr lang="en-US" sz="1400" dirty="0">
-                <a:solidFill>
-                  <a:srgbClr val="1E2A33"/>
-                </a:solidFill>
-                <a:latin typeface="Calibri" pitchFamily="34" charset="0"/>
-                <a:ea typeface="Calibri" pitchFamily="34" charset="-122"/>
-                <a:cs typeface="Calibri" pitchFamily="34" charset="-120"/>
-              </a:rPr>
-              <a:t>Mientras observan, pide que anoten en silencio: ¿el movimiento se siente igual todo el tiempo, o cambia?</a:t>
-            </a:r>
-            <a:endParaRPr lang="en-US" sz="1400" dirty="0"/>
-          </a:p>
-          <a:p>
-            <a:pPr marL="342900" indent="-342900">
-              <a:spcAft>
-                <a:spcPts val="1400"/>
-              </a:spcAft>
-              <a:buSzPct val="100000"/>
-              <a:buChar char="•"/>
-            </a:pPr>
-            <a:r>
-              <a:rPr lang="en-US" sz="1400" dirty="0">
-                <a:solidFill>
-                  <a:srgbClr val="1E2A33"/>
-                </a:solidFill>
-                <a:latin typeface="Calibri" pitchFamily="34" charset="0"/>
-                <a:ea typeface="Calibri" pitchFamily="34" charset="-122"/>
-                <a:cs typeface="Calibri" pitchFamily="34" charset="-120"/>
-              </a:rPr>
-              <a:t>Cierra el video y da 1–2 minutos para compartir en parejas lo que notaron.</a:t>
-            </a:r>
-            <a:endParaRPr lang="en-US" sz="1400" dirty="0"/>
-          </a:p>
-          <a:p>
-            <a:pPr marL="342900" indent="-342900">
-              <a:spcAft>
-                <a:spcPts val="1400"/>
-              </a:spcAft>
-              <a:buSzPct val="100000"/>
-              <a:buChar char="•"/>
-            </a:pPr>
-            <a:r>
-              <a:rPr lang="en-US" sz="1400" dirty="0">
-                <a:solidFill>
-                  <a:srgbClr val="1E2A33"/>
-                </a:solidFill>
-                <a:latin typeface="Calibri" pitchFamily="34" charset="0"/>
-                <a:ea typeface="Calibri" pitchFamily="34" charset="-122"/>
-                <a:cs typeface="Calibri" pitchFamily="34" charset="-120"/>
-              </a:rPr>
-              <a:t>Pregunta detonante: "¿Por qué un sismo se siente distinto al principio que después — primero un golpe seco, luego un vaivén?"</a:t>
+              <a:t>Por qué un sismo se siente distinto al principio que después — primero un golpe seco, luego un vaivén?"</a:t>
             </a:r>
             <a:endParaRPr lang="en-US" sz="1400" dirty="0"/>
           </a:p>
@@ -4371,6 +4318,92 @@
   <p:clrMapOvr>
     <a:masterClrMapping/>
   </p:clrMapOvr>
+  <p:timing>
+    <p:tnLst>
+      <p:par>
+        <p:cTn id="1" dur="indefinite" restart="never" nodeType="tmRoot">
+          <p:childTnLst>
+            <p:seq concurrent="1" nextAc="seek">
+              <p:cTn id="2" dur="indefinite" nodeType="mainSeq">
+                <p:childTnLst>
+                  <p:par>
+                    <p:cTn id="3" fill="hold">
+                      <p:stCondLst>
+                        <p:cond delay="indefinite"/>
+                      </p:stCondLst>
+                      <p:childTnLst>
+                        <p:par>
+                          <p:cTn id="4" fill="hold">
+                            <p:stCondLst>
+                              <p:cond delay="0"/>
+                            </p:stCondLst>
+                            <p:childTnLst>
+                              <p:par>
+                                <p:cTn id="5" presetID="10" presetClass="entr" presetSubtype="0" fill="hold" grpId="0" nodeType="clickEffect">
+                                  <p:stCondLst>
+                                    <p:cond delay="0"/>
+                                  </p:stCondLst>
+                                  <p:childTnLst>
+                                    <p:set>
+                                      <p:cBhvr>
+                                        <p:cTn id="6" dur="1" fill="hold">
+                                          <p:stCondLst>
+                                            <p:cond delay="0"/>
+                                          </p:stCondLst>
+                                        </p:cTn>
+                                        <p:tgtEl>
+                                          <p:spTgt spid="8"/>
+                                        </p:tgtEl>
+                                        <p:attrNameLst>
+                                          <p:attrName>style.visibility</p:attrName>
+                                        </p:attrNameLst>
+                                      </p:cBhvr>
+                                      <p:to>
+                                        <p:strVal val="visible"/>
+                                      </p:to>
+                                    </p:set>
+                                    <p:animEffect transition="in" filter="fade">
+                                      <p:cBhvr>
+                                        <p:cTn id="7" dur="500"/>
+                                        <p:tgtEl>
+                                          <p:spTgt spid="8"/>
+                                        </p:tgtEl>
+                                      </p:cBhvr>
+                                    </p:animEffect>
+                                  </p:childTnLst>
+                                </p:cTn>
+                              </p:par>
+                            </p:childTnLst>
+                          </p:cTn>
+                        </p:par>
+                      </p:childTnLst>
+                    </p:cTn>
+                  </p:par>
+                </p:childTnLst>
+              </p:cTn>
+              <p:prevCondLst>
+                <p:cond evt="onPrev" delay="0">
+                  <p:tgtEl>
+                    <p:sldTgt/>
+                  </p:tgtEl>
+                </p:cond>
+              </p:prevCondLst>
+              <p:nextCondLst>
+                <p:cond evt="onNext" delay="0">
+                  <p:tgtEl>
+                    <p:sldTgt/>
+                  </p:tgtEl>
+                </p:cond>
+              </p:nextCondLst>
+            </p:seq>
+          </p:childTnLst>
+        </p:cTn>
+      </p:par>
+    </p:tnLst>
+    <p:bldLst>
+      <p:bldP spid="8" grpId="0" animBg="1"/>
+    </p:bldLst>
+  </p:timing>
 </p:sld>
 </file>
 
